--- a/Präsentation/WestLogiX_Pitch_neoimpulse.pptx
+++ b/Präsentation/WestLogiX_Pitch_neoimpulse.pptx
@@ -312,7 +312,7 @@
               <a:rPr lang="en-US"/>
               <a:t>1</a:t>
             </a:fld>
-            <a:endParaRPr lang="en-US"/>
+            <a:endParaRPr lang="en-US" dirty="0"/>
           </a:p>
         </p:txBody>
       </p:sp>
@@ -396,7 +396,7 @@
               <a:rPr lang="en-US"/>
               <a:t>2</a:t>
             </a:fld>
-            <a:endParaRPr lang="en-US"/>
+            <a:endParaRPr lang="en-US" dirty="0"/>
           </a:p>
         </p:txBody>
       </p:sp>
@@ -480,7 +480,7 @@
               <a:rPr lang="en-US"/>
               <a:t>3</a:t>
             </a:fld>
-            <a:endParaRPr lang="en-US"/>
+            <a:endParaRPr lang="en-US" dirty="0"/>
           </a:p>
         </p:txBody>
       </p:sp>
@@ -564,7 +564,7 @@
               <a:rPr lang="en-US"/>
               <a:t>4</a:t>
             </a:fld>
-            <a:endParaRPr lang="en-US"/>
+            <a:endParaRPr lang="en-US" dirty="0"/>
           </a:p>
         </p:txBody>
       </p:sp>
@@ -648,7 +648,7 @@
               <a:rPr lang="en-US"/>
               <a:t>5</a:t>
             </a:fld>
-            <a:endParaRPr lang="en-US"/>
+            <a:endParaRPr lang="en-US" dirty="0"/>
           </a:p>
         </p:txBody>
       </p:sp>
@@ -732,7 +732,7 @@
               <a:rPr lang="en-US"/>
               <a:t>6</a:t>
             </a:fld>
-            <a:endParaRPr lang="en-US"/>
+            <a:endParaRPr lang="en-US" dirty="0"/>
           </a:p>
         </p:txBody>
       </p:sp>
@@ -816,7 +816,7 @@
               <a:rPr lang="en-US"/>
               <a:t>7</a:t>
             </a:fld>
-            <a:endParaRPr lang="en-US"/>
+            <a:endParaRPr lang="en-US" dirty="0"/>
           </a:p>
         </p:txBody>
       </p:sp>
@@ -900,7 +900,7 @@
               <a:rPr lang="en-US"/>
               <a:t>8</a:t>
             </a:fld>
-            <a:endParaRPr lang="en-US"/>
+            <a:endParaRPr lang="en-US" dirty="0"/>
           </a:p>
         </p:txBody>
       </p:sp>
@@ -984,7 +984,7 @@
               <a:rPr lang="en-US"/>
               <a:t>9</a:t>
             </a:fld>
-            <a:endParaRPr lang="en-US"/>
+            <a:endParaRPr lang="en-US" dirty="0"/>
           </a:p>
         </p:txBody>
       </p:sp>
@@ -1088,7 +1088,7 @@
           <a:p>
             <a:pPr algn="l"/>
             <a:r>
-              <a:rPr lang="de-DE" sz="1000">
+              <a:rPr lang="de-DE" sz="1000" dirty="0" err="1">
                 <a:solidFill>
                   <a:srgbClr val="000000">
                     <a:alpha val="50000"/>
@@ -1098,6 +1098,14 @@
               </a:rPr>
               <a:t>Confidential</a:t>
             </a:r>
+            <a:endParaRPr lang="de-DE" sz="1000" dirty="0">
+              <a:solidFill>
+                <a:srgbClr val="000000">
+                  <a:alpha val="50000"/>
+                </a:srgbClr>
+              </a:solidFill>
+              <a:latin typeface="Aptos" panose="020B0004020202020204" pitchFamily="34" charset="0"/>
+            </a:endParaRPr>
           </a:p>
         </p:txBody>
       </p:sp>
@@ -1414,7 +1422,7 @@
           <a:bodyPr/>
           <a:lstStyle/>
           <a:p>
-            <a:endParaRPr lang="de-DE"/>
+            <a:endParaRPr lang="de-DE" dirty="0"/>
           </a:p>
         </p:txBody>
       </p:sp>
@@ -1446,7 +1454,7 @@
           <a:bodyPr/>
           <a:lstStyle/>
           <a:p>
-            <a:endParaRPr lang="de-DE"/>
+            <a:endParaRPr lang="de-DE" dirty="0"/>
           </a:p>
         </p:txBody>
       </p:sp>
@@ -1515,7 +1523,7 @@
           <a:bodyPr/>
           <a:lstStyle/>
           <a:p>
-            <a:endParaRPr lang="de-DE"/>
+            <a:endParaRPr lang="de-DE" dirty="0"/>
           </a:p>
         </p:txBody>
       </p:sp>
@@ -1694,7 +1702,7 @@
           <a:bodyPr/>
           <a:lstStyle/>
           <a:p>
-            <a:endParaRPr lang="de-DE"/>
+            <a:endParaRPr lang="de-DE" dirty="0"/>
           </a:p>
         </p:txBody>
       </p:sp>
@@ -1726,7 +1734,7 @@
           <a:bodyPr/>
           <a:lstStyle/>
           <a:p>
-            <a:endParaRPr lang="de-DE"/>
+            <a:endParaRPr lang="de-DE" dirty="0"/>
           </a:p>
         </p:txBody>
       </p:sp>
@@ -1843,7 +1851,7 @@
           <a:bodyPr/>
           <a:lstStyle/>
           <a:p>
-            <a:endParaRPr lang="de-DE"/>
+            <a:endParaRPr lang="de-DE" dirty="0"/>
           </a:p>
         </p:txBody>
       </p:sp>
@@ -1875,7 +1883,7 @@
           <a:bodyPr/>
           <a:lstStyle/>
           <a:p>
-            <a:endParaRPr lang="de-DE"/>
+            <a:endParaRPr lang="de-DE" dirty="0"/>
           </a:p>
         </p:txBody>
       </p:sp>
@@ -1992,7 +2000,7 @@
           <a:bodyPr/>
           <a:lstStyle/>
           <a:p>
-            <a:endParaRPr lang="de-DE"/>
+            <a:endParaRPr lang="de-DE" dirty="0"/>
           </a:p>
         </p:txBody>
       </p:sp>
@@ -2024,7 +2032,7 @@
           <a:bodyPr/>
           <a:lstStyle/>
           <a:p>
-            <a:endParaRPr lang="de-DE"/>
+            <a:endParaRPr lang="de-DE" dirty="0"/>
           </a:p>
         </p:txBody>
       </p:sp>
@@ -2236,7 +2244,7 @@
           <a:bodyPr/>
           <a:lstStyle/>
           <a:p>
-            <a:endParaRPr lang="de-DE"/>
+            <a:endParaRPr lang="de-DE" dirty="0"/>
           </a:p>
         </p:txBody>
       </p:sp>
@@ -2268,7 +2276,7 @@
           <a:bodyPr/>
           <a:lstStyle/>
           <a:p>
-            <a:endParaRPr lang="de-DE"/>
+            <a:endParaRPr lang="de-DE" dirty="0"/>
           </a:p>
         </p:txBody>
       </p:sp>
@@ -2402,7 +2410,7 @@
           <a:bodyPr/>
           <a:lstStyle/>
           <a:p>
-            <a:endParaRPr lang="de-DE"/>
+            <a:endParaRPr lang="de-DE" dirty="0"/>
           </a:p>
         </p:txBody>
       </p:sp>
@@ -2434,7 +2442,7 @@
           <a:bodyPr/>
           <a:lstStyle/>
           <a:p>
-            <a:endParaRPr lang="de-DE"/>
+            <a:endParaRPr lang="de-DE" dirty="0"/>
           </a:p>
         </p:txBody>
       </p:sp>
@@ -2583,7 +2591,7 @@
           <a:bodyPr/>
           <a:lstStyle/>
           <a:p>
-            <a:endParaRPr lang="de-DE"/>
+            <a:endParaRPr lang="de-DE" dirty="0"/>
           </a:p>
         </p:txBody>
       </p:sp>
@@ -2700,7 +2708,7 @@
           <a:bodyPr/>
           <a:lstStyle/>
           <a:p>
-            <a:endParaRPr lang="de-DE"/>
+            <a:endParaRPr lang="de-DE" dirty="0"/>
           </a:p>
         </p:txBody>
       </p:sp>
@@ -2732,7 +2740,7 @@
           <a:bodyPr/>
           <a:lstStyle/>
           <a:p>
-            <a:endParaRPr lang="de-DE"/>
+            <a:endParaRPr lang="de-DE" dirty="0"/>
           </a:p>
         </p:txBody>
       </p:sp>
@@ -2881,7 +2889,7 @@
           <a:bodyPr/>
           <a:lstStyle/>
           <a:p>
-            <a:endParaRPr lang="de-DE"/>
+            <a:endParaRPr lang="de-DE" dirty="0"/>
           </a:p>
         </p:txBody>
       </p:sp>
@@ -2998,7 +3006,7 @@
           <a:bodyPr/>
           <a:lstStyle/>
           <a:p>
-            <a:endParaRPr lang="de-DE"/>
+            <a:endParaRPr lang="de-DE" dirty="0"/>
           </a:p>
         </p:txBody>
       </p:sp>
@@ -3030,7 +3038,7 @@
           <a:bodyPr/>
           <a:lstStyle/>
           <a:p>
-            <a:endParaRPr lang="de-DE"/>
+            <a:endParaRPr lang="de-DE" dirty="0"/>
           </a:p>
         </p:txBody>
       </p:sp>
@@ -3179,7 +3187,7 @@
           <a:bodyPr/>
           <a:lstStyle/>
           <a:p>
-            <a:endParaRPr lang="de-DE"/>
+            <a:endParaRPr lang="de-DE" dirty="0"/>
           </a:p>
         </p:txBody>
       </p:sp>
@@ -3391,7 +3399,7 @@
           <a:bodyPr/>
           <a:lstStyle/>
           <a:p>
-            <a:endParaRPr lang="de-DE"/>
+            <a:endParaRPr lang="de-DE" dirty="0"/>
           </a:p>
         </p:txBody>
       </p:sp>
@@ -3423,7 +3431,7 @@
           <a:bodyPr/>
           <a:lstStyle/>
           <a:p>
-            <a:endParaRPr lang="de-DE"/>
+            <a:endParaRPr lang="de-DE" dirty="0"/>
           </a:p>
         </p:txBody>
       </p:sp>
@@ -3579,7 +3587,7 @@
           <a:bodyPr/>
           <a:lstStyle/>
           <a:p>
-            <a:endParaRPr lang="de-DE"/>
+            <a:endParaRPr lang="de-DE" dirty="0"/>
           </a:p>
         </p:txBody>
       </p:sp>
@@ -3611,7 +3619,7 @@
           <a:bodyPr/>
           <a:lstStyle/>
           <a:p>
-            <a:endParaRPr lang="de-DE"/>
+            <a:endParaRPr lang="de-DE" dirty="0"/>
           </a:p>
         </p:txBody>
       </p:sp>
@@ -3763,7 +3771,7 @@
           <a:bodyPr/>
           <a:lstStyle/>
           <a:p>
-            <a:endParaRPr lang="de-DE"/>
+            <a:endParaRPr lang="de-DE" dirty="0"/>
           </a:p>
         </p:txBody>
       </p:sp>
@@ -3880,7 +3888,7 @@
           <a:bodyPr/>
           <a:lstStyle/>
           <a:p>
-            <a:endParaRPr lang="de-DE"/>
+            <a:endParaRPr lang="de-DE" dirty="0"/>
           </a:p>
         </p:txBody>
       </p:sp>
@@ -3912,7 +3920,7 @@
           <a:bodyPr/>
           <a:lstStyle/>
           <a:p>
-            <a:endParaRPr lang="de-DE"/>
+            <a:endParaRPr lang="de-DE" dirty="0"/>
           </a:p>
         </p:txBody>
       </p:sp>
@@ -4064,7 +4072,7 @@
           <a:bodyPr/>
           <a:lstStyle/>
           <a:p>
-            <a:endParaRPr lang="de-DE"/>
+            <a:endParaRPr lang="de-DE" dirty="0"/>
           </a:p>
         </p:txBody>
       </p:sp>
@@ -4181,7 +4189,7 @@
           <a:bodyPr/>
           <a:lstStyle/>
           <a:p>
-            <a:endParaRPr lang="de-DE"/>
+            <a:endParaRPr lang="de-DE" dirty="0"/>
           </a:p>
         </p:txBody>
       </p:sp>
@@ -4213,7 +4221,7 @@
           <a:bodyPr/>
           <a:lstStyle/>
           <a:p>
-            <a:endParaRPr lang="de-DE"/>
+            <a:endParaRPr lang="de-DE" dirty="0"/>
           </a:p>
         </p:txBody>
       </p:sp>
@@ -4365,7 +4373,7 @@
           <a:bodyPr/>
           <a:lstStyle/>
           <a:p>
-            <a:endParaRPr lang="de-DE"/>
+            <a:endParaRPr lang="de-DE" dirty="0"/>
           </a:p>
         </p:txBody>
       </p:sp>
@@ -4577,7 +4585,7 @@
           <a:bodyPr/>
           <a:lstStyle/>
           <a:p>
-            <a:endParaRPr lang="de-DE"/>
+            <a:endParaRPr lang="de-DE" dirty="0"/>
           </a:p>
         </p:txBody>
       </p:sp>
@@ -4609,7 +4617,7 @@
           <a:bodyPr/>
           <a:lstStyle/>
           <a:p>
-            <a:endParaRPr lang="de-DE"/>
+            <a:endParaRPr lang="de-DE" dirty="0"/>
           </a:p>
         </p:txBody>
       </p:sp>
@@ -4750,7 +4758,7 @@
           <a:bodyPr/>
           <a:lstStyle/>
           <a:p>
-            <a:endParaRPr lang="de-DE"/>
+            <a:endParaRPr lang="de-DE" dirty="0"/>
           </a:p>
         </p:txBody>
       </p:sp>
@@ -4782,7 +4790,7 @@
           <a:bodyPr/>
           <a:lstStyle/>
           <a:p>
-            <a:endParaRPr lang="de-DE"/>
+            <a:endParaRPr lang="de-DE" dirty="0"/>
           </a:p>
         </p:txBody>
       </p:sp>
@@ -4968,7 +4976,7 @@
           <a:bodyPr/>
           <a:lstStyle/>
           <a:p>
-            <a:endParaRPr lang="de-DE"/>
+            <a:endParaRPr lang="de-DE" dirty="0"/>
           </a:p>
         </p:txBody>
       </p:sp>
@@ -5115,7 +5123,7 @@
           <a:bodyPr/>
           <a:lstStyle/>
           <a:p>
-            <a:endParaRPr lang="de-DE"/>
+            <a:endParaRPr lang="de-DE" dirty="0"/>
           </a:p>
         </p:txBody>
       </p:sp>
@@ -5264,7 +5272,7 @@
           <a:bodyPr/>
           <a:lstStyle/>
           <a:p>
-            <a:endParaRPr lang="de-DE"/>
+            <a:endParaRPr lang="de-DE" dirty="0"/>
           </a:p>
         </p:txBody>
       </p:sp>
@@ -5440,7 +5448,7 @@
           <a:bodyPr/>
           <a:lstStyle/>
           <a:p>
-            <a:endParaRPr lang="de-DE"/>
+            <a:endParaRPr lang="de-DE" dirty="0"/>
           </a:p>
         </p:txBody>
       </p:sp>
@@ -5472,7 +5480,7 @@
           <a:bodyPr/>
           <a:lstStyle/>
           <a:p>
-            <a:endParaRPr lang="de-DE"/>
+            <a:endParaRPr lang="de-DE" dirty="0"/>
           </a:p>
         </p:txBody>
       </p:sp>
@@ -5587,29 +5595,7 @@
                 <a:ea typeface="Calibri" pitchFamily="34" charset="-122"/>
                 <a:cs typeface="Calibri" pitchFamily="34" charset="-120"/>
               </a:rPr>
-              <a:t>Der Agent läuft lokal auf </a:t>
-            </a:r>
-            <a:r>
-              <a:rPr lang="en-US" sz="1300" dirty="0" err="1">
-                <a:solidFill>
-                  <a:srgbClr val="4A6080"/>
-                </a:solidFill>
-                <a:latin typeface="Calibri" pitchFamily="34" charset="0"/>
-                <a:ea typeface="Calibri" pitchFamily="34" charset="-122"/>
-                <a:cs typeface="Calibri" pitchFamily="34" charset="-120"/>
-              </a:rPr>
-              <a:t>meinem</a:t>
-            </a:r>
-            <a:r>
-              <a:rPr lang="en-US" sz="1300" dirty="0">
-                <a:solidFill>
-                  <a:srgbClr val="4A6080"/>
-                </a:solidFill>
-                <a:latin typeface="Calibri" pitchFamily="34" charset="0"/>
-                <a:ea typeface="Calibri" pitchFamily="34" charset="-122"/>
-                <a:cs typeface="Calibri" pitchFamily="34" charset="-120"/>
-              </a:rPr>
-              <a:t> PC und spricht direkt mit den Daten.</a:t>
+              <a:t>Der Agent läuft lokal auf meinem PC und spricht direkt mit den Daten.</a:t>
             </a:r>
             <a:endParaRPr lang="en-US" sz="1300" dirty="0"/>
           </a:p>
@@ -5728,7 +5714,7 @@
           <a:bodyPr/>
           <a:lstStyle/>
           <a:p>
-            <a:endParaRPr lang="de-DE"/>
+            <a:endParaRPr lang="de-DE" dirty="0"/>
           </a:p>
         </p:txBody>
       </p:sp>
@@ -5760,7 +5746,7 @@
           <a:bodyPr/>
           <a:lstStyle/>
           <a:p>
-            <a:endParaRPr lang="de-DE"/>
+            <a:endParaRPr lang="de-DE" dirty="0"/>
           </a:p>
         </p:txBody>
       </p:sp>
@@ -5797,29 +5783,7 @@
                 <a:ea typeface="Calibri" pitchFamily="34" charset="-122"/>
                 <a:cs typeface="Calibri" pitchFamily="34" charset="-120"/>
               </a:rPr>
-              <a:t>Was </a:t>
-            </a:r>
-            <a:r>
-              <a:rPr lang="en-US" sz="1300" b="1" dirty="0" err="1">
-                <a:solidFill>
-                  <a:srgbClr val="1B3A6B"/>
-                </a:solidFill>
-                <a:latin typeface="Calibri" pitchFamily="34" charset="0"/>
-                <a:ea typeface="Calibri" pitchFamily="34" charset="-122"/>
-                <a:cs typeface="Calibri" pitchFamily="34" charset="-120"/>
-              </a:rPr>
-              <a:t>wir</a:t>
-            </a:r>
-            <a:r>
-              <a:rPr lang="en-US" sz="1300" b="1" dirty="0">
-                <a:solidFill>
-                  <a:srgbClr val="1B3A6B"/>
-                </a:solidFill>
-                <a:latin typeface="Calibri" pitchFamily="34" charset="0"/>
-                <a:ea typeface="Calibri" pitchFamily="34" charset="-122"/>
-                <a:cs typeface="Calibri" pitchFamily="34" charset="-120"/>
-              </a:rPr>
-              <a:t> </a:t>
+              <a:t>Was wir </a:t>
             </a:r>
             <a:r>
               <a:rPr lang="en-US" sz="1300" b="1" dirty="0" err="1">
@@ -5875,7 +5839,7 @@
           <a:bodyPr/>
           <a:lstStyle/>
           <a:p>
-            <a:endParaRPr lang="de-DE"/>
+            <a:endParaRPr lang="de-DE" dirty="0"/>
           </a:p>
         </p:txBody>
       </p:sp>
@@ -5946,7 +5910,7 @@
           <a:bodyPr/>
           <a:lstStyle/>
           <a:p>
-            <a:endParaRPr lang="de-DE"/>
+            <a:endParaRPr lang="de-DE" dirty="0"/>
           </a:p>
         </p:txBody>
       </p:sp>
@@ -6017,7 +5981,7 @@
           <a:bodyPr/>
           <a:lstStyle/>
           <a:p>
-            <a:endParaRPr lang="de-DE"/>
+            <a:endParaRPr lang="de-DE" dirty="0"/>
           </a:p>
         </p:txBody>
       </p:sp>
@@ -6088,7 +6052,7 @@
           <a:bodyPr/>
           <a:lstStyle/>
           <a:p>
-            <a:endParaRPr lang="de-DE"/>
+            <a:endParaRPr lang="de-DE" dirty="0"/>
           </a:p>
         </p:txBody>
       </p:sp>
@@ -6159,7 +6123,7 @@
           <a:bodyPr/>
           <a:lstStyle/>
           <a:p>
-            <a:endParaRPr lang="de-DE"/>
+            <a:endParaRPr lang="de-DE" dirty="0"/>
           </a:p>
         </p:txBody>
       </p:sp>
@@ -6362,7 +6326,7 @@
           <a:bodyPr/>
           <a:lstStyle/>
           <a:p>
-            <a:endParaRPr lang="de-DE"/>
+            <a:endParaRPr lang="de-DE" dirty="0"/>
           </a:p>
         </p:txBody>
       </p:sp>
@@ -6394,7 +6358,7 @@
           <a:bodyPr/>
           <a:lstStyle/>
           <a:p>
-            <a:endParaRPr lang="de-DE"/>
+            <a:endParaRPr lang="de-DE" dirty="0"/>
           </a:p>
         </p:txBody>
       </p:sp>
@@ -6504,7 +6468,7 @@
           <a:bodyPr/>
           <a:lstStyle/>
           <a:p>
-            <a:endParaRPr lang="de-DE"/>
+            <a:endParaRPr lang="de-DE" dirty="0"/>
           </a:p>
         </p:txBody>
       </p:sp>
@@ -6575,7 +6539,7 @@
           <a:bodyPr/>
           <a:lstStyle/>
           <a:p>
-            <a:endParaRPr lang="de-DE"/>
+            <a:endParaRPr lang="de-DE" dirty="0"/>
           </a:p>
         </p:txBody>
       </p:sp>
@@ -6646,7 +6610,7 @@
           <a:bodyPr/>
           <a:lstStyle/>
           <a:p>
-            <a:endParaRPr lang="de-DE"/>
+            <a:endParaRPr lang="de-DE" dirty="0"/>
           </a:p>
         </p:txBody>
       </p:sp>
@@ -6717,7 +6681,7 @@
           <a:bodyPr/>
           <a:lstStyle/>
           <a:p>
-            <a:endParaRPr lang="de-DE"/>
+            <a:endParaRPr lang="de-DE" dirty="0"/>
           </a:p>
         </p:txBody>
       </p:sp>
@@ -6788,7 +6752,7 @@
           <a:bodyPr/>
           <a:lstStyle/>
           <a:p>
-            <a:endParaRPr lang="de-DE"/>
+            <a:endParaRPr lang="de-DE" dirty="0"/>
           </a:p>
         </p:txBody>
       </p:sp>
@@ -6859,7 +6823,7 @@
           <a:bodyPr/>
           <a:lstStyle/>
           <a:p>
-            <a:endParaRPr lang="de-DE"/>
+            <a:endParaRPr lang="de-DE" dirty="0"/>
           </a:p>
         </p:txBody>
       </p:sp>
@@ -6930,7 +6894,7 @@
           <a:bodyPr/>
           <a:lstStyle/>
           <a:p>
-            <a:endParaRPr lang="de-DE"/>
+            <a:endParaRPr lang="de-DE" dirty="0"/>
           </a:p>
         </p:txBody>
       </p:sp>
@@ -7001,7 +6965,7 @@
           <a:bodyPr/>
           <a:lstStyle/>
           <a:p>
-            <a:endParaRPr lang="de-DE"/>
+            <a:endParaRPr lang="de-DE" dirty="0"/>
           </a:p>
         </p:txBody>
       </p:sp>
@@ -7072,7 +7036,7 @@
           <a:bodyPr/>
           <a:lstStyle/>
           <a:p>
-            <a:endParaRPr lang="de-DE"/>
+            <a:endParaRPr lang="de-DE" dirty="0"/>
           </a:p>
         </p:txBody>
       </p:sp>
@@ -7143,7 +7107,7 @@
           <a:bodyPr/>
           <a:lstStyle/>
           <a:p>
-            <a:endParaRPr lang="de-DE"/>
+            <a:endParaRPr lang="de-DE" dirty="0"/>
           </a:p>
         </p:txBody>
       </p:sp>
@@ -7214,7 +7178,7 @@
           <a:bodyPr/>
           <a:lstStyle/>
           <a:p>
-            <a:endParaRPr lang="de-DE"/>
+            <a:endParaRPr lang="de-DE" dirty="0"/>
           </a:p>
         </p:txBody>
       </p:sp>
@@ -7285,7 +7249,7 @@
           <a:bodyPr/>
           <a:lstStyle/>
           <a:p>
-            <a:endParaRPr lang="de-DE"/>
+            <a:endParaRPr lang="de-DE" dirty="0"/>
           </a:p>
         </p:txBody>
       </p:sp>
@@ -7356,7 +7320,7 @@
           <a:bodyPr/>
           <a:lstStyle/>
           <a:p>
-            <a:endParaRPr lang="de-DE"/>
+            <a:endParaRPr lang="de-DE" dirty="0"/>
           </a:p>
         </p:txBody>
       </p:sp>
@@ -7427,7 +7391,7 @@
           <a:bodyPr/>
           <a:lstStyle/>
           <a:p>
-            <a:endParaRPr lang="de-DE"/>
+            <a:endParaRPr lang="de-DE" dirty="0"/>
           </a:p>
         </p:txBody>
       </p:sp>
@@ -7498,7 +7462,7 @@
           <a:bodyPr/>
           <a:lstStyle/>
           <a:p>
-            <a:endParaRPr lang="de-DE"/>
+            <a:endParaRPr lang="de-DE" dirty="0"/>
           </a:p>
         </p:txBody>
       </p:sp>
@@ -7569,7 +7533,7 @@
           <a:bodyPr/>
           <a:lstStyle/>
           <a:p>
-            <a:endParaRPr lang="de-DE"/>
+            <a:endParaRPr lang="de-DE" dirty="0"/>
           </a:p>
         </p:txBody>
       </p:sp>
@@ -7640,7 +7604,7 @@
           <a:bodyPr/>
           <a:lstStyle/>
           <a:p>
-            <a:endParaRPr lang="de-DE"/>
+            <a:endParaRPr lang="de-DE" dirty="0"/>
           </a:p>
         </p:txBody>
       </p:sp>
@@ -7711,7 +7675,7 @@
           <a:bodyPr/>
           <a:lstStyle/>
           <a:p>
-            <a:endParaRPr lang="de-DE"/>
+            <a:endParaRPr lang="de-DE" dirty="0"/>
           </a:p>
         </p:txBody>
       </p:sp>
@@ -7782,7 +7746,7 @@
           <a:bodyPr/>
           <a:lstStyle/>
           <a:p>
-            <a:endParaRPr lang="de-DE"/>
+            <a:endParaRPr lang="de-DE" dirty="0"/>
           </a:p>
         </p:txBody>
       </p:sp>
@@ -7853,7 +7817,7 @@
           <a:bodyPr/>
           <a:lstStyle/>
           <a:p>
-            <a:endParaRPr lang="de-DE"/>
+            <a:endParaRPr lang="de-DE" dirty="0"/>
           </a:p>
         </p:txBody>
       </p:sp>
@@ -7931,7 +7895,7 @@
           <a:bodyPr/>
           <a:lstStyle/>
           <a:p>
-            <a:endParaRPr lang="de-DE"/>
+            <a:endParaRPr lang="de-DE" dirty="0"/>
           </a:p>
         </p:txBody>
       </p:sp>
@@ -8091,7 +8055,7 @@
           <a:bodyPr/>
           <a:lstStyle/>
           <a:p>
-            <a:endParaRPr lang="de-DE"/>
+            <a:endParaRPr lang="de-DE" dirty="0"/>
           </a:p>
         </p:txBody>
       </p:sp>
@@ -8199,7 +8163,7 @@
           <a:bodyPr/>
           <a:lstStyle/>
           <a:p>
-            <a:endParaRPr lang="de-DE"/>
+            <a:endParaRPr lang="de-DE" dirty="0"/>
           </a:p>
         </p:txBody>
       </p:sp>
@@ -8320,7 +8284,7 @@
           <a:bodyPr/>
           <a:lstStyle/>
           <a:p>
-            <a:endParaRPr lang="de-DE"/>
+            <a:endParaRPr lang="de-DE" dirty="0"/>
           </a:p>
         </p:txBody>
       </p:sp>
@@ -8571,7 +8535,7 @@
           <a:bodyPr/>
           <a:lstStyle/>
           <a:p>
-            <a:endParaRPr lang="de-DE"/>
+            <a:endParaRPr lang="de-DE" dirty="0"/>
           </a:p>
         </p:txBody>
       </p:sp>
@@ -8603,7 +8567,7 @@
           <a:bodyPr/>
           <a:lstStyle/>
           <a:p>
-            <a:endParaRPr lang="de-DE"/>
+            <a:endParaRPr lang="de-DE" dirty="0"/>
           </a:p>
         </p:txBody>
       </p:sp>
@@ -8720,7 +8684,7 @@
           <a:bodyPr/>
           <a:lstStyle/>
           <a:p>
-            <a:endParaRPr lang="de-DE"/>
+            <a:endParaRPr lang="de-DE" dirty="0"/>
           </a:p>
         </p:txBody>
       </p:sp>
@@ -8752,7 +8716,7 @@
           <a:bodyPr/>
           <a:lstStyle/>
           <a:p>
-            <a:endParaRPr lang="de-DE"/>
+            <a:endParaRPr lang="de-DE" dirty="0"/>
           </a:p>
         </p:txBody>
       </p:sp>
@@ -8823,7 +8787,7 @@
           <a:bodyPr/>
           <a:lstStyle/>
           <a:p>
-            <a:endParaRPr lang="de-DE"/>
+            <a:endParaRPr lang="de-DE" dirty="0"/>
           </a:p>
         </p:txBody>
       </p:sp>
@@ -8894,7 +8858,7 @@
           <a:bodyPr/>
           <a:lstStyle/>
           <a:p>
-            <a:endParaRPr lang="de-DE"/>
+            <a:endParaRPr lang="de-DE" dirty="0"/>
           </a:p>
         </p:txBody>
       </p:sp>
@@ -8965,7 +8929,7 @@
           <a:bodyPr/>
           <a:lstStyle/>
           <a:p>
-            <a:endParaRPr lang="de-DE"/>
+            <a:endParaRPr lang="de-DE" dirty="0"/>
           </a:p>
         </p:txBody>
       </p:sp>
@@ -9036,7 +9000,7 @@
           <a:bodyPr/>
           <a:lstStyle/>
           <a:p>
-            <a:endParaRPr lang="de-DE"/>
+            <a:endParaRPr lang="de-DE" dirty="0"/>
           </a:p>
         </p:txBody>
       </p:sp>
@@ -9107,7 +9071,7 @@
           <a:bodyPr/>
           <a:lstStyle/>
           <a:p>
-            <a:endParaRPr lang="de-DE"/>
+            <a:endParaRPr lang="de-DE" dirty="0"/>
           </a:p>
         </p:txBody>
       </p:sp>
@@ -9185,7 +9149,7 @@
           <a:bodyPr/>
           <a:lstStyle/>
           <a:p>
-            <a:endParaRPr lang="de-DE"/>
+            <a:endParaRPr lang="de-DE" dirty="0"/>
           </a:p>
         </p:txBody>
       </p:sp>
@@ -9217,7 +9181,7 @@
           <a:bodyPr/>
           <a:lstStyle/>
           <a:p>
-            <a:endParaRPr lang="de-DE"/>
+            <a:endParaRPr lang="de-DE" dirty="0"/>
           </a:p>
         </p:txBody>
       </p:sp>
@@ -9288,7 +9252,7 @@
           <a:bodyPr/>
           <a:lstStyle/>
           <a:p>
-            <a:endParaRPr lang="de-DE"/>
+            <a:endParaRPr lang="de-DE" dirty="0"/>
           </a:p>
         </p:txBody>
       </p:sp>
@@ -9359,7 +9323,7 @@
           <a:bodyPr/>
           <a:lstStyle/>
           <a:p>
-            <a:endParaRPr lang="de-DE"/>
+            <a:endParaRPr lang="de-DE" dirty="0"/>
           </a:p>
         </p:txBody>
       </p:sp>
@@ -9430,7 +9394,7 @@
           <a:bodyPr/>
           <a:lstStyle/>
           <a:p>
-            <a:endParaRPr lang="de-DE"/>
+            <a:endParaRPr lang="de-DE" dirty="0"/>
           </a:p>
         </p:txBody>
       </p:sp>
@@ -9501,7 +9465,7 @@
           <a:bodyPr/>
           <a:lstStyle/>
           <a:p>
-            <a:endParaRPr lang="de-DE"/>
+            <a:endParaRPr lang="de-DE" dirty="0"/>
           </a:p>
         </p:txBody>
       </p:sp>
@@ -9579,7 +9543,7 @@
           <a:bodyPr/>
           <a:lstStyle/>
           <a:p>
-            <a:endParaRPr lang="de-DE"/>
+            <a:endParaRPr lang="de-DE" dirty="0"/>
           </a:p>
         </p:txBody>
       </p:sp>
@@ -9611,7 +9575,7 @@
           <a:bodyPr/>
           <a:lstStyle/>
           <a:p>
-            <a:endParaRPr lang="de-DE"/>
+            <a:endParaRPr lang="de-DE" dirty="0"/>
           </a:p>
         </p:txBody>
       </p:sp>
@@ -9682,7 +9646,7 @@
           <a:bodyPr/>
           <a:lstStyle/>
           <a:p>
-            <a:endParaRPr lang="de-DE"/>
+            <a:endParaRPr lang="de-DE" dirty="0"/>
           </a:p>
         </p:txBody>
       </p:sp>
@@ -9753,7 +9717,7 @@
           <a:bodyPr/>
           <a:lstStyle/>
           <a:p>
-            <a:endParaRPr lang="de-DE"/>
+            <a:endParaRPr lang="de-DE" dirty="0"/>
           </a:p>
         </p:txBody>
       </p:sp>
@@ -9824,7 +9788,7 @@
           <a:bodyPr/>
           <a:lstStyle/>
           <a:p>
-            <a:endParaRPr lang="de-DE"/>
+            <a:endParaRPr lang="de-DE" dirty="0"/>
           </a:p>
         </p:txBody>
       </p:sp>
@@ -9895,7 +9859,7 @@
           <a:bodyPr/>
           <a:lstStyle/>
           <a:p>
-            <a:endParaRPr lang="de-DE"/>
+            <a:endParaRPr lang="de-DE" dirty="0"/>
           </a:p>
         </p:txBody>
       </p:sp>
@@ -10068,7 +10032,7 @@
           <a:bodyPr/>
           <a:lstStyle/>
           <a:p>
-            <a:endParaRPr lang="de-DE"/>
+            <a:endParaRPr lang="de-DE" dirty="0"/>
           </a:p>
         </p:txBody>
       </p:sp>
@@ -10100,7 +10064,7 @@
           <a:bodyPr/>
           <a:lstStyle/>
           <a:p>
-            <a:endParaRPr lang="de-DE"/>
+            <a:endParaRPr lang="de-DE" dirty="0"/>
           </a:p>
         </p:txBody>
       </p:sp>
@@ -10256,7 +10220,7 @@
           <a:bodyPr/>
           <a:lstStyle/>
           <a:p>
-            <a:endParaRPr lang="de-DE"/>
+            <a:endParaRPr lang="de-DE" dirty="0"/>
           </a:p>
         </p:txBody>
       </p:sp>
@@ -10288,7 +10252,7 @@
           <a:bodyPr/>
           <a:lstStyle/>
           <a:p>
-            <a:endParaRPr lang="de-DE"/>
+            <a:endParaRPr lang="de-DE" dirty="0"/>
           </a:p>
         </p:txBody>
       </p:sp>
@@ -10396,7 +10360,7 @@
           <a:bodyPr/>
           <a:lstStyle/>
           <a:p>
-            <a:endParaRPr lang="de-DE"/>
+            <a:endParaRPr lang="de-DE" dirty="0"/>
           </a:p>
         </p:txBody>
       </p:sp>
@@ -10428,7 +10392,7 @@
           <a:bodyPr/>
           <a:lstStyle/>
           <a:p>
-            <a:endParaRPr lang="de-DE"/>
+            <a:endParaRPr lang="de-DE" dirty="0"/>
           </a:p>
         </p:txBody>
       </p:sp>
@@ -10499,7 +10463,7 @@
           <a:bodyPr/>
           <a:lstStyle/>
           <a:p>
-            <a:endParaRPr lang="de-DE"/>
+            <a:endParaRPr lang="de-DE" dirty="0"/>
           </a:p>
         </p:txBody>
       </p:sp>
@@ -10570,7 +10534,7 @@
           <a:bodyPr/>
           <a:lstStyle/>
           <a:p>
-            <a:endParaRPr lang="de-DE"/>
+            <a:endParaRPr lang="de-DE" dirty="0"/>
           </a:p>
         </p:txBody>
       </p:sp>
@@ -10641,7 +10605,7 @@
           <a:bodyPr/>
           <a:lstStyle/>
           <a:p>
-            <a:endParaRPr lang="de-DE"/>
+            <a:endParaRPr lang="de-DE" dirty="0"/>
           </a:p>
         </p:txBody>
       </p:sp>
@@ -10719,7 +10683,7 @@
           <a:bodyPr/>
           <a:lstStyle/>
           <a:p>
-            <a:endParaRPr lang="de-DE"/>
+            <a:endParaRPr lang="de-DE" dirty="0"/>
           </a:p>
         </p:txBody>
       </p:sp>
@@ -10751,7 +10715,7 @@
           <a:bodyPr/>
           <a:lstStyle/>
           <a:p>
-            <a:endParaRPr lang="de-DE"/>
+            <a:endParaRPr lang="de-DE" dirty="0"/>
           </a:p>
         </p:txBody>
       </p:sp>
@@ -10859,7 +10823,7 @@
           <a:bodyPr/>
           <a:lstStyle/>
           <a:p>
-            <a:endParaRPr lang="de-DE"/>
+            <a:endParaRPr lang="de-DE" dirty="0"/>
           </a:p>
         </p:txBody>
       </p:sp>
@@ -10891,7 +10855,7 @@
           <a:bodyPr/>
           <a:lstStyle/>
           <a:p>
-            <a:endParaRPr lang="de-DE"/>
+            <a:endParaRPr lang="de-DE" dirty="0"/>
           </a:p>
         </p:txBody>
       </p:sp>
@@ -10962,7 +10926,7 @@
           <a:bodyPr/>
           <a:lstStyle/>
           <a:p>
-            <a:endParaRPr lang="de-DE"/>
+            <a:endParaRPr lang="de-DE" dirty="0"/>
           </a:p>
         </p:txBody>
       </p:sp>
@@ -11033,7 +10997,7 @@
           <a:bodyPr/>
           <a:lstStyle/>
           <a:p>
-            <a:endParaRPr lang="de-DE"/>
+            <a:endParaRPr lang="de-DE" dirty="0"/>
           </a:p>
         </p:txBody>
       </p:sp>
@@ -11104,7 +11068,7 @@
           <a:bodyPr/>
           <a:lstStyle/>
           <a:p>
-            <a:endParaRPr lang="de-DE"/>
+            <a:endParaRPr lang="de-DE" dirty="0"/>
           </a:p>
         </p:txBody>
       </p:sp>
@@ -11182,7 +11146,7 @@
           <a:bodyPr/>
           <a:lstStyle/>
           <a:p>
-            <a:endParaRPr lang="de-DE"/>
+            <a:endParaRPr lang="de-DE" dirty="0"/>
           </a:p>
         </p:txBody>
       </p:sp>
@@ -11214,7 +11178,7 @@
           <a:bodyPr/>
           <a:lstStyle/>
           <a:p>
-            <a:endParaRPr lang="de-DE"/>
+            <a:endParaRPr lang="de-DE" dirty="0"/>
           </a:p>
         </p:txBody>
       </p:sp>
@@ -11322,7 +11286,7 @@
           <a:bodyPr/>
           <a:lstStyle/>
           <a:p>
-            <a:endParaRPr lang="de-DE"/>
+            <a:endParaRPr lang="de-DE" dirty="0"/>
           </a:p>
         </p:txBody>
       </p:sp>
@@ -11354,7 +11318,7 @@
           <a:bodyPr/>
           <a:lstStyle/>
           <a:p>
-            <a:endParaRPr lang="de-DE"/>
+            <a:endParaRPr lang="de-DE" dirty="0"/>
           </a:p>
         </p:txBody>
       </p:sp>
@@ -11425,7 +11389,7 @@
           <a:bodyPr/>
           <a:lstStyle/>
           <a:p>
-            <a:endParaRPr lang="de-DE"/>
+            <a:endParaRPr lang="de-DE" dirty="0"/>
           </a:p>
         </p:txBody>
       </p:sp>
@@ -11496,7 +11460,7 @@
           <a:bodyPr/>
           <a:lstStyle/>
           <a:p>
-            <a:endParaRPr lang="de-DE"/>
+            <a:endParaRPr lang="de-DE" dirty="0"/>
           </a:p>
         </p:txBody>
       </p:sp>
@@ -11567,7 +11531,7 @@
           <a:bodyPr/>
           <a:lstStyle/>
           <a:p>
-            <a:endParaRPr lang="de-DE"/>
+            <a:endParaRPr lang="de-DE" dirty="0"/>
           </a:p>
         </p:txBody>
       </p:sp>
@@ -11740,7 +11704,7 @@
           <a:bodyPr/>
           <a:lstStyle/>
           <a:p>
-            <a:endParaRPr lang="de-DE"/>
+            <a:endParaRPr lang="de-DE" dirty="0"/>
           </a:p>
         </p:txBody>
       </p:sp>
@@ -11772,7 +11736,7 @@
           <a:bodyPr/>
           <a:lstStyle/>
           <a:p>
-            <a:endParaRPr lang="de-DE"/>
+            <a:endParaRPr lang="de-DE" dirty="0"/>
           </a:p>
         </p:txBody>
       </p:sp>
@@ -11889,7 +11853,7 @@
           <a:bodyPr/>
           <a:lstStyle/>
           <a:p>
-            <a:endParaRPr lang="de-DE"/>
+            <a:endParaRPr lang="de-DE" dirty="0"/>
           </a:p>
         </p:txBody>
       </p:sp>
@@ -11921,7 +11885,7 @@
           <a:bodyPr/>
           <a:lstStyle/>
           <a:p>
-            <a:endParaRPr lang="de-DE"/>
+            <a:endParaRPr lang="de-DE" dirty="0"/>
           </a:p>
         </p:txBody>
       </p:sp>
@@ -12077,7 +12041,7 @@
           <a:bodyPr/>
           <a:lstStyle/>
           <a:p>
-            <a:endParaRPr lang="de-DE"/>
+            <a:endParaRPr lang="de-DE" dirty="0"/>
           </a:p>
         </p:txBody>
       </p:sp>
@@ -12109,7 +12073,7 @@
           <a:bodyPr/>
           <a:lstStyle/>
           <a:p>
-            <a:endParaRPr lang="de-DE"/>
+            <a:endParaRPr lang="de-DE" dirty="0"/>
           </a:p>
         </p:txBody>
       </p:sp>
@@ -12265,7 +12229,7 @@
           <a:bodyPr/>
           <a:lstStyle/>
           <a:p>
-            <a:endParaRPr lang="de-DE"/>
+            <a:endParaRPr lang="de-DE" dirty="0"/>
           </a:p>
         </p:txBody>
       </p:sp>
@@ -12297,7 +12261,7 @@
           <a:bodyPr/>
           <a:lstStyle/>
           <a:p>
-            <a:endParaRPr lang="de-DE"/>
+            <a:endParaRPr lang="de-DE" dirty="0"/>
           </a:p>
         </p:txBody>
       </p:sp>
@@ -12444,7 +12408,7 @@
           <a:bodyPr/>
           <a:lstStyle/>
           <a:p>
-            <a:endParaRPr lang="de-DE"/>
+            <a:endParaRPr lang="de-DE" dirty="0"/>
           </a:p>
         </p:txBody>
       </p:sp>

--- a/Präsentation/WestLogiX_Pitch_neoimpulse.pptx
+++ b/Präsentation/WestLogiX_Pitch_neoimpulse.pptx
@@ -373,6 +373,107 @@
           <a:bodyPr/>
           <a:lstStyle/>
           <a:p>
+            <a:r>
+              <a:rPr lang="de-DE" dirty="0"/>
+              <a:t>35% Schichtzeit = Laufzeit</a:t>
+            </a:r>
+          </a:p>
+          <a:p>
+            <a:r>
+              <a:rPr lang="de-DE" dirty="0"/>
+              <a:t>Das ist ein anerkannter Branchen-Benchmark aus der Lagerlogistik-Forschung (u.a. Fraunhofer IML). </a:t>
+            </a:r>
+          </a:p>
+          <a:p>
+            <a:r>
+              <a:rPr lang="de-DE" dirty="0"/>
+              <a:t>In manuellen Pick-Lagern gehen je nach Layout 30–50% der Arbeitszeit für reine Wege drauf. 35% ist der konservative Mittelwert. </a:t>
+            </a:r>
+          </a:p>
+          <a:p>
+            <a:r>
+              <a:rPr lang="de-DE" dirty="0"/>
+              <a:t>Wenn jemand fragt: „Das ist ein Richtwert aus Logistikstudien — bei euren Kunden kann es mehr oder weniger sein, das messen wir im Pilot."</a:t>
+            </a:r>
+          </a:p>
+          <a:p>
+            <a:endParaRPr lang="de-DE" dirty="0"/>
+          </a:p>
+          <a:p>
+            <a:r>
+              <a:rPr lang="de-DE" dirty="0"/>
+              <a:t>18 Min Ø Wartezeit / Auftrag</a:t>
+            </a:r>
+          </a:p>
+          <a:p>
+            <a:r>
+              <a:rPr lang="de-DE" dirty="0"/>
+              <a:t>Das ist eine realistische Schätzung: </a:t>
+            </a:r>
+          </a:p>
+          <a:p>
+            <a:r>
+              <a:rPr lang="de-DE" dirty="0"/>
+              <a:t>EWM weist Aufträge zu ohne zu wissen ob der Picker gerade pausiert, in einer anderen Zone ist </a:t>
+            </a:r>
+          </a:p>
+          <a:p>
+            <a:r>
+              <a:rPr lang="de-DE" dirty="0"/>
+              <a:t>oder blockiert ist. Der Auftrag wartet oder landet beim falschen Picker → Neuzuweisung. 18 Min ist ein plausibler Durchschnitt </a:t>
+            </a:r>
+          </a:p>
+          <a:p>
+            <a:r>
+              <a:rPr lang="de-DE" dirty="0"/>
+              <a:t>für mittelgroße Lager. Wenn jemand fragt: „Das ist eine konservative Schätzung — in größeren Lagern oder mit vielen Handübergaben ist es oft mehr."</a:t>
+            </a:r>
+          </a:p>
+          <a:p>
+            <a:endParaRPr lang="de-DE" dirty="0"/>
+          </a:p>
+          <a:p>
+            <a:r>
+              <a:rPr lang="de-DE" dirty="0"/>
+              <a:t>±45 Min ETA-Abweichung</a:t>
+            </a:r>
+          </a:p>
+          <a:p>
+            <a:r>
+              <a:rPr lang="de-DE" dirty="0"/>
+              <a:t>Das ist die Realität ohne Echtzeit-Tracking: Versand schätzt wann ein Auftrag fertig ist, baut 45+ Min Puffer ein weil niemand es </a:t>
+            </a:r>
+          </a:p>
+          <a:p>
+            <a:r>
+              <a:rPr lang="de-DE" dirty="0"/>
+              <a:t>wirklich weiß → LKW wartet oder zu früh da. Das kennt jeder SAP-EWM-Consultant aus der Praxis. Wenn jemand fragt: „Das ist meine direkte </a:t>
+            </a:r>
+          </a:p>
+          <a:p>
+            <a:r>
+              <a:rPr lang="de-DE" dirty="0"/>
+              <a:t>Erfahrung aus Projekten — die genaue Zahl messen wir im Pilot."</a:t>
+            </a:r>
+          </a:p>
+          <a:p>
+            <a:endParaRPr lang="de-DE" dirty="0"/>
+          </a:p>
+          <a:p>
+            <a:r>
+              <a:rPr lang="de-DE" dirty="0"/>
+              <a:t>Der Kern für morgen: Diese Zahlen sind Branchen-Richtwerte und Praxiserfahrung — kein wissenschaftliches Paper dahinter. Das ist auch okay so. </a:t>
+            </a:r>
+          </a:p>
+          <a:p>
+            <a:r>
+              <a:rPr lang="de-DE" dirty="0"/>
+              <a:t>Wenn jemand bohrt: ehrlich sagen dass der Pilot die echten Zahlen liefert. </a:t>
+            </a:r>
+            <a:r>
+              <a:rPr lang="de-DE"/>
+              <a:t>Das macht es sogar stärker — „genau deshalb brauchen wir den Pilot."</a:t>
+            </a:r>
             <a:endParaRPr lang="en-US" dirty="0"/>
           </a:p>
         </p:txBody>
@@ -457,6 +558,107 @@
           <a:bodyPr/>
           <a:lstStyle/>
           <a:p>
+            <a:r>
+              <a:rPr lang="de-DE" dirty="0"/>
+              <a:t>35% Schichtzeit = Laufzeit</a:t>
+            </a:r>
+          </a:p>
+          <a:p>
+            <a:r>
+              <a:rPr lang="de-DE" dirty="0"/>
+              <a:t>Das ist ein anerkannter Branchen-Benchmark aus der Lagerlogistik-Forschung (u.a. Fraunhofer IML). </a:t>
+            </a:r>
+          </a:p>
+          <a:p>
+            <a:r>
+              <a:rPr lang="de-DE" dirty="0"/>
+              <a:t>In manuellen Pick-Lagern gehen je nach Layout 30–50% der Arbeitszeit für reine Wege drauf. 35% ist der konservative Mittelwert. </a:t>
+            </a:r>
+          </a:p>
+          <a:p>
+            <a:r>
+              <a:rPr lang="de-DE" dirty="0"/>
+              <a:t>Wenn jemand fragt: „Das ist ein Richtwert aus Logistikstudien — bei euren Kunden kann es mehr oder weniger sein, das messen wir im Pilot."</a:t>
+            </a:r>
+          </a:p>
+          <a:p>
+            <a:endParaRPr lang="de-DE" dirty="0"/>
+          </a:p>
+          <a:p>
+            <a:r>
+              <a:rPr lang="de-DE" dirty="0"/>
+              <a:t>18 Min Ø Wartezeit / Auftrag</a:t>
+            </a:r>
+          </a:p>
+          <a:p>
+            <a:r>
+              <a:rPr lang="de-DE" dirty="0"/>
+              <a:t>Das ist eine realistische Schätzung: </a:t>
+            </a:r>
+          </a:p>
+          <a:p>
+            <a:r>
+              <a:rPr lang="de-DE" dirty="0"/>
+              <a:t>EWM weist Aufträge zu ohne zu wissen ob der Picker gerade pausiert, in einer anderen Zone ist </a:t>
+            </a:r>
+          </a:p>
+          <a:p>
+            <a:r>
+              <a:rPr lang="de-DE" dirty="0"/>
+              <a:t>oder blockiert ist. Der Auftrag wartet oder landet beim falschen Picker → Neuzuweisung. 18 Min ist ein plausibler Durchschnitt </a:t>
+            </a:r>
+          </a:p>
+          <a:p>
+            <a:r>
+              <a:rPr lang="de-DE" dirty="0"/>
+              <a:t>für mittelgroße Lager. Wenn jemand fragt: „Das ist eine konservative Schätzung — in größeren Lagern oder mit vielen Handübergaben ist es oft mehr."</a:t>
+            </a:r>
+          </a:p>
+          <a:p>
+            <a:endParaRPr lang="de-DE" dirty="0"/>
+          </a:p>
+          <a:p>
+            <a:r>
+              <a:rPr lang="de-DE" dirty="0"/>
+              <a:t>±45 Min ETA-Abweichung</a:t>
+            </a:r>
+          </a:p>
+          <a:p>
+            <a:r>
+              <a:rPr lang="de-DE" dirty="0"/>
+              <a:t>Das ist die Realität ohne Echtzeit-Tracking: Versand schätzt wann ein Auftrag fertig ist, baut 45+ Min Puffer ein weil niemand es </a:t>
+            </a:r>
+          </a:p>
+          <a:p>
+            <a:r>
+              <a:rPr lang="de-DE" dirty="0"/>
+              <a:t>wirklich weiß → LKW wartet oder zu früh da. Das kennt jeder SAP-EWM-Consultant aus der Praxis. Wenn jemand fragt: „Das ist meine direkte </a:t>
+            </a:r>
+          </a:p>
+          <a:p>
+            <a:r>
+              <a:rPr lang="de-DE" dirty="0"/>
+              <a:t>Erfahrung aus Projekten — die genaue Zahl messen wir im Pilot."</a:t>
+            </a:r>
+          </a:p>
+          <a:p>
+            <a:endParaRPr lang="de-DE" dirty="0"/>
+          </a:p>
+          <a:p>
+            <a:r>
+              <a:rPr lang="de-DE" dirty="0"/>
+              <a:t>Der Kern für morgen: Diese Zahlen sind Branchen-Richtwerte und Praxiserfahrung — kein wissenschaftliches Paper dahinter. Das ist auch okay so. </a:t>
+            </a:r>
+          </a:p>
+          <a:p>
+            <a:r>
+              <a:rPr lang="de-DE" dirty="0"/>
+              <a:t>Wenn jemand bohrt: ehrlich sagen dass der Pilot die echten Zahlen liefert. </a:t>
+            </a:r>
+            <a:r>
+              <a:rPr lang="de-DE"/>
+              <a:t>Das macht es sogar stärker — „genau deshalb brauchen wir den Pilot."</a:t>
+            </a:r>
             <a:endParaRPr lang="en-US" dirty="0"/>
           </a:p>
         </p:txBody>
@@ -541,6 +743,14 @@
           <a:bodyPr/>
           <a:lstStyle/>
           <a:p>
+            <a:r>
+              <a:rPr lang="de-DE" dirty="0"/>
+              <a:t>„Das LLM ist der intelligente Vermittler — es versteht was der Lagerleiter fragt, wählt das richtige Tool aus, und formuliert die Antwort in verständlicher Sprache. Die echten Berechnungen macht der Code darunter. </a:t>
+            </a:r>
+            <a:r>
+              <a:rPr lang="de-DE"/>
+              <a:t>Das LLM macht SAP-Daten für jeden zugänglich — ohne Transaktion, ohne Schulung."</a:t>
+            </a:r>
             <a:endParaRPr lang="en-US" dirty="0"/>
           </a:p>
         </p:txBody>
